--- a/assets/pptx/catalog-379.pptx
+++ b/assets/pptx/catalog-379.pptx
@@ -3368,7 +3368,7 @@
                 <a:ea typeface="Ebrima"/>
                 <a:cs typeface="Ebrima"/>
               </a:rPr>
-              <a:t>ክዱስ (12) እንዳንተ የለም ጌታ</a:t>
+              <a:t>ክዱስ 12 እንዳንተ የለም ጌታ</a:t>
             </a:r>
           </a:p>
           <a:p>
@@ -3646,7 +3646,7 @@
                 <a:ea typeface="Ebrima"/>
                 <a:cs typeface="Ebrima"/>
               </a:rPr>
-              <a:t>ክዱስ (12) እንዳንተ የለም ጌታ</a:t>
+              <a:t>ክዱስ 12 እንዳንተ የለም ጌታ</a:t>
             </a:r>
           </a:p>
           <a:p>
